--- a/public/WO-Workflow-Presentation.pptx
+++ b/public/WO-Workflow-Presentation.pptx
@@ -3270,7 +3270,7 @@
               </a:defRPr>
             </a:pPr>
             <a:r>
-              <a:t>Enterprise Asset Management Platform</a:t>
+              <a:t>Asset Management Platform</a:t>
             </a:r>
           </a:p>
         </p:txBody>
